--- a/output/slides/group4_workshop1_ai-retrofit-architecture.pptx
+++ b/output/slides/group4_workshop1_ai-retrofit-architecture.pptx
@@ -348,7 +348,7 @@
             <a:pPr indent="0" algn="r">
               <a:buNone/>
             </a:pPr>
-            <a:fld id="{13518ED6-5CAB-4DE4-B7C4-0F810A6FFE5D}" type="slidenum">
+            <a:fld id="{F0F078A6-7B6B-4984-AA40-1B76915BAB7F}" type="slidenum">
               <a:rPr b="0" lang="en-US" sz="1400" spc="-1" strike="noStrike">
                 <a:solidFill>
                   <a:srgbClr val="000000"/>
@@ -501,7 +501,7 @@
               </a:lnSpc>
               <a:buNone/>
             </a:pPr>
-            <a:fld id="{234C290C-2B0A-4433-84FC-B4F7EC8BD44C}" type="slidenum">
+            <a:fld id="{36F73FDC-026C-4EEF-9463-02FADA962514}" type="slidenum">
               <a:rPr b="0" lang="en-US" sz="1200" spc="-1" strike="noStrike">
                 <a:solidFill>
                   <a:schemeClr val="dk1"/>
@@ -654,7 +654,7 @@
               </a:lnSpc>
               <a:buNone/>
             </a:pPr>
-            <a:fld id="{C4E1F724-A53E-4408-9616-C252B8F3CC52}" type="slidenum">
+            <a:fld id="{87CEF527-54E2-4AA2-A383-5CDA47D35FDA}" type="slidenum">
               <a:rPr b="0" lang="en-US" sz="1200" spc="-1" strike="noStrike">
                 <a:solidFill>
                   <a:schemeClr val="dk1"/>
@@ -807,7 +807,7 @@
               </a:lnSpc>
               <a:buNone/>
             </a:pPr>
-            <a:fld id="{04B66229-4E53-4CDF-BE07-E285572E037E}" type="slidenum">
+            <a:fld id="{F8D581B6-26C5-4963-9CE3-BBE9C053F36C}" type="slidenum">
               <a:rPr b="0" lang="en-US" sz="1200" spc="-1" strike="noStrike">
                 <a:solidFill>
                   <a:schemeClr val="dk1"/>
@@ -960,7 +960,7 @@
               </a:lnSpc>
               <a:buNone/>
             </a:pPr>
-            <a:fld id="{2DC5A3CB-B2C8-4BF4-8DD3-46EF0D6836A6}" type="slidenum">
+            <a:fld id="{D17A88E1-04A8-42C0-A9BE-4A0DD4B76915}" type="slidenum">
               <a:rPr b="0" lang="en-US" sz="1200" spc="-1" strike="noStrike">
                 <a:solidFill>
                   <a:schemeClr val="dk1"/>
@@ -1113,7 +1113,7 @@
               </a:lnSpc>
               <a:buNone/>
             </a:pPr>
-            <a:fld id="{108EB094-A869-4FB4-9117-7B98F65C450B}" type="slidenum">
+            <a:fld id="{787CE712-5AD3-4F7D-AA7E-57B2E2AFC446}" type="slidenum">
               <a:rPr b="0" lang="en-US" sz="1200" spc="-1" strike="noStrike">
                 <a:solidFill>
                   <a:schemeClr val="dk1"/>
@@ -1266,7 +1266,7 @@
               </a:lnSpc>
               <a:buNone/>
             </a:pPr>
-            <a:fld id="{87B096A6-5EAF-434B-BEA1-0C2503EF03D9}" type="slidenum">
+            <a:fld id="{7F2B82E7-DE0D-49AF-B296-E22D87B991A7}" type="slidenum">
               <a:rPr b="0" lang="en-US" sz="1200" spc="-1" strike="noStrike">
                 <a:solidFill>
                   <a:schemeClr val="dk1"/>
@@ -1419,7 +1419,7 @@
               </a:lnSpc>
               <a:buNone/>
             </a:pPr>
-            <a:fld id="{137F7305-9455-4EC0-9492-86621D2EE769}" type="slidenum">
+            <a:fld id="{1211BDA1-0CCA-49A8-8B30-5F7A86AD5725}" type="slidenum">
               <a:rPr b="0" lang="en-US" sz="1200" spc="-1" strike="noStrike">
                 <a:solidFill>
                   <a:schemeClr val="dk1"/>
@@ -1572,7 +1572,7 @@
               </a:lnSpc>
               <a:buNone/>
             </a:pPr>
-            <a:fld id="{B63AAFF0-4701-4DAE-BB9E-2A2C2185056B}" type="slidenum">
+            <a:fld id="{C187F844-C7A4-4699-86BA-7383B6EF4425}" type="slidenum">
               <a:rPr b="0" lang="en-US" sz="1200" spc="-1" strike="noStrike">
                 <a:solidFill>
                   <a:schemeClr val="dk1"/>
@@ -1725,7 +1725,7 @@
               </a:lnSpc>
               <a:buNone/>
             </a:pPr>
-            <a:fld id="{9CBFB88A-3BB2-4D03-A423-C1F4672FD721}" type="slidenum">
+            <a:fld id="{D43AF841-675B-4696-913C-A1824CC3ED5A}" type="slidenum">
               <a:rPr b="0" lang="en-US" sz="1200" spc="-1" strike="noStrike">
                 <a:solidFill>
                   <a:schemeClr val="dk1"/>
@@ -1878,7 +1878,7 @@
               </a:lnSpc>
               <a:buNone/>
             </a:pPr>
-            <a:fld id="{F3CDB323-F587-469B-8C52-69AC2D8750DD}" type="slidenum">
+            <a:fld id="{A641C4A4-AAC4-45C0-8B51-3BC6E4482509}" type="slidenum">
               <a:rPr b="0" lang="en-US" sz="1200" spc="-1" strike="noStrike">
                 <a:solidFill>
                   <a:schemeClr val="dk1"/>
@@ -1955,7 +1955,7 @@
         <p:txBody>
           <a:bodyPr/>
           <a:p>
-            <a:fld id="{7C521CA6-E949-4416-A476-5F3C299D6B59}" type="slidenum">
+            <a:fld id="{803D65CB-ADB3-41FC-921C-D13E7C85760E}" type="slidenum">
               <a:t>&lt;#&gt;</a:t>
             </a:fld>
           </a:p>
@@ -2071,7 +2071,7 @@
               </a:lnSpc>
               <a:buNone/>
             </a:pPr>
-            <a:fld id="{291B00F0-3F29-4843-A730-02FCE441726C}" type="slidenum">
+            <a:fld id="{59DC65BC-457D-43D2-AB50-FCB88F89242B}" type="slidenum">
               <a:rPr b="0" lang="en-US" sz="1200" spc="-1" strike="noStrike">
                 <a:solidFill>
                   <a:srgbClr val="2a3f7c"/>
@@ -3559,7 +3559,7 @@
               </a:lnSpc>
               <a:buNone/>
             </a:pPr>
-            <a:fld id="{498EB347-AA17-43C5-8615-67BF77DD8D05}" type="slidenum">
+            <a:fld id="{FC39DBF1-DAD5-4869-976C-1A2D3A814215}" type="slidenum">
               <a:rPr b="0" lang="en-US" sz="1200" spc="-1" strike="noStrike">
                 <a:solidFill>
                   <a:srgbClr val="2a3f7c"/>
@@ -5479,7 +5479,7 @@
               </a:lnSpc>
               <a:buNone/>
             </a:pPr>
-            <a:fld id="{F846D79B-3BDB-4EA8-8C56-43695F6AAC23}" type="slidenum">
+            <a:fld id="{DE75C8DF-1166-4928-8DDE-AF0AD6945C26}" type="slidenum">
               <a:rPr b="0" lang="en-US" sz="1200" spc="-1" strike="noStrike">
                 <a:solidFill>
                   <a:srgbClr val="2a3f7c"/>
@@ -8167,7 +8167,7 @@
               </a:lnSpc>
               <a:buNone/>
             </a:pPr>
-            <a:fld id="{1704A66C-0BAC-4962-89D5-432DD9827C27}" type="slidenum">
+            <a:fld id="{D8D9FC58-636F-4534-8BC6-359362FEF66C}" type="slidenum">
               <a:rPr b="0" lang="en-US" sz="1200" spc="-1" strike="noStrike">
                 <a:solidFill>
                   <a:srgbClr val="2a3f7c"/>
@@ -8618,7 +8618,7 @@
               </a:lnSpc>
               <a:buNone/>
             </a:pPr>
-            <a:fld id="{1F5F35E8-92C7-436A-A722-E6E1610D5CD3}" type="slidenum">
+            <a:fld id="{431A4C6C-4938-4F06-8F29-373FFC1D5533}" type="slidenum">
               <a:rPr b="0" lang="en-US" sz="1200" spc="-1" strike="noStrike">
                 <a:solidFill>
                   <a:srgbClr val="2a3f7c"/>
@@ -8701,7 +8701,7 @@
         </p:nvSpPr>
         <p:spPr>
           <a:xfrm>
-            <a:off x="1570680" y="2824200"/>
+            <a:off x="1600200" y="2743200"/>
             <a:ext cx="5101560" cy="403200"/>
           </a:xfrm>
           <a:prstGeom prst="rect">
@@ -8946,7 +8946,7 @@
         </p:nvSpPr>
         <p:spPr>
           <a:xfrm>
-            <a:off x="7780320" y="2658240"/>
+            <a:off x="7780320" y="2671200"/>
             <a:ext cx="1820880" cy="835200"/>
           </a:xfrm>
           <a:prstGeom prst="rect">
@@ -9406,7 +9406,7 @@
         </p:nvSpPr>
         <p:spPr>
           <a:xfrm>
-            <a:off x="1570680" y="6188040"/>
+            <a:off x="1570680" y="6008040"/>
             <a:ext cx="2040480" cy="194040"/>
           </a:xfrm>
           <a:prstGeom prst="rect">
@@ -9463,7 +9463,7 @@
         </p:nvSpPr>
         <p:spPr>
           <a:xfrm>
-            <a:off x="1570680" y="6382440"/>
+            <a:off x="1570680" y="6202440"/>
             <a:ext cx="5337360" cy="208800"/>
           </a:xfrm>
           <a:prstGeom prst="rect">
@@ -9822,7 +9822,7 @@
               </a:lnSpc>
               <a:buNone/>
             </a:pPr>
-            <a:fld id="{6823F8DF-90E7-4BA8-8511-65C48C8BAE95}" type="slidenum">
+            <a:fld id="{68216003-F7FF-4C06-8DEE-D1B13C5A18DF}" type="slidenum">
               <a:rPr b="0" lang="en-US" sz="1200" spc="-1" strike="noStrike">
                 <a:solidFill>
                   <a:srgbClr val="2a3f7c"/>
@@ -11311,7 +11311,7 @@
               </a:lnSpc>
               <a:buNone/>
             </a:pPr>
-            <a:fld id="{FF34F05A-CB24-4AA1-A88F-2E3D01B54C49}" type="slidenum">
+            <a:fld id="{8EF5B41D-6873-43DB-9667-A6F0E61DFA97}" type="slidenum">
               <a:rPr b="0" lang="en-US" sz="1200" spc="-1" strike="noStrike">
                 <a:solidFill>
                   <a:srgbClr val="2a3f7c"/>
@@ -15437,7 +15437,7 @@
               </a:lnSpc>
               <a:buNone/>
             </a:pPr>
-            <a:fld id="{17F9B13F-62E1-472C-BB97-2C5F4F2D03E2}" type="slidenum">
+            <a:fld id="{744441B8-72CA-4D99-A312-30E649AFA6C1}" type="slidenum">
               <a:rPr b="0" lang="en-US" sz="1200" spc="-1" strike="noStrike">
                 <a:solidFill>
                   <a:srgbClr val="2a3f7c"/>
@@ -17612,7 +17612,7 @@
               </a:lnSpc>
               <a:buNone/>
             </a:pPr>
-            <a:fld id="{BAF638D8-6637-4801-A294-9485E2020B6F}" type="slidenum">
+            <a:fld id="{FF323AE9-73C7-4554-9035-F462B53A8B36}" type="slidenum">
               <a:rPr b="0" lang="en-US" sz="1200" spc="-1" strike="noStrike">
                 <a:solidFill>
                   <a:srgbClr val="2a3f7c"/>
@@ -20274,7 +20274,7 @@
               </a:lnSpc>
               <a:buNone/>
             </a:pPr>
-            <a:fld id="{ECFAB353-B847-4FDB-82D1-31A05781BE0B}" type="slidenum">
+            <a:fld id="{8EB931CA-0986-4B35-93E7-865F17137F5B}" type="slidenum">
               <a:rPr b="0" lang="en-US" sz="1200" spc="-1" strike="noStrike">
                 <a:solidFill>
                   <a:srgbClr val="2a3f7c"/>
@@ -21207,7 +21207,7 @@
         </p:nvSpPr>
         <p:spPr>
           <a:xfrm>
-            <a:off x="731520" y="4727520"/>
+            <a:off x="695520" y="4043520"/>
             <a:ext cx="6171840" cy="1261440"/>
           </a:xfrm>
           <a:prstGeom prst="roundRect">
@@ -21255,7 +21255,7 @@
         </p:nvSpPr>
         <p:spPr>
           <a:xfrm>
-            <a:off x="1060560" y="5083920"/>
+            <a:off x="1024560" y="4399920"/>
             <a:ext cx="5257440" cy="328680"/>
           </a:xfrm>
           <a:prstGeom prst="rect">
@@ -21322,7 +21322,7 @@
         </p:nvSpPr>
         <p:spPr>
           <a:xfrm>
-            <a:off x="1060560" y="5596200"/>
+            <a:off x="1024560" y="4912200"/>
             <a:ext cx="2559960" cy="164160"/>
           </a:xfrm>
           <a:prstGeom prst="rect">
@@ -22208,7 +22208,7 @@
               </a:lnSpc>
               <a:buNone/>
             </a:pPr>
-            <a:fld id="{D5B2FCFB-0C97-46C8-AF7D-90FE9DE511E4}" type="slidenum">
+            <a:fld id="{37870D40-95B2-4752-9239-02DF1320D8AE}" type="slidenum">
               <a:rPr b="0" lang="en-US" sz="1200" spc="-1" strike="noStrike">
                 <a:solidFill>
                   <a:srgbClr val="2a3f7c"/>
